--- a/Наработки/диздоки/Испания/Испания центристы.pptx
+++ b/Наработки/диздоки/Испания/Испания центристы.pptx
@@ -209,7 +209,7 @@
             <a:fld id="{33E3D7F9-E251-484C-A6FF-FA958879DF69}" type="datetimeFigureOut">
               <a:rPr lang="ru-RU" smtClean="0"/>
               <a:pPr/>
-              <a:t>01.09.2021</a:t>
+              <a:t>05.05.2026</a:t>
             </a:fld>
             <a:endParaRPr lang="ru-RU"/>
           </a:p>
@@ -273,38 +273,37 @@
           <a:p>
             <a:pPr lvl="0"/>
             <a:r>
-              <a:rPr lang="ru-RU" smtClean="0"/>
+              <a:rPr lang="ru-RU"/>
               <a:t>Образец текста</a:t>
             </a:r>
           </a:p>
           <a:p>
             <a:pPr lvl="1"/>
             <a:r>
-              <a:rPr lang="ru-RU" smtClean="0"/>
+              <a:rPr lang="ru-RU"/>
               <a:t>Второй уровень</a:t>
             </a:r>
           </a:p>
           <a:p>
             <a:pPr lvl="2"/>
             <a:r>
-              <a:rPr lang="ru-RU" smtClean="0"/>
+              <a:rPr lang="ru-RU"/>
               <a:t>Третий уровень</a:t>
             </a:r>
           </a:p>
           <a:p>
             <a:pPr lvl="3"/>
             <a:r>
-              <a:rPr lang="ru-RU" smtClean="0"/>
+              <a:rPr lang="ru-RU"/>
               <a:t>Четвертый уровень</a:t>
             </a:r>
           </a:p>
           <a:p>
             <a:pPr lvl="4"/>
             <a:r>
-              <a:rPr lang="ru-RU" smtClean="0"/>
+              <a:rPr lang="ru-RU"/>
               <a:t>Пятый уровень</a:t>
             </a:r>
-            <a:endParaRPr lang="ru-RU"/>
           </a:p>
         </p:txBody>
       </p:sp>
@@ -610,7 +609,7 @@
           </a:lstStyle>
           <a:p>
             <a:r>
-              <a:rPr lang="ru-RU" smtClean="0"/>
+              <a:rPr lang="ru-RU"/>
               <a:t>Образец заголовка</a:t>
             </a:r>
             <a:endParaRPr lang="en-US" dirty="0"/>
@@ -675,7 +674,7 @@
           </a:lstStyle>
           <a:p>
             <a:r>
-              <a:rPr lang="ru-RU" smtClean="0"/>
+              <a:rPr lang="ru-RU"/>
               <a:t>Образец подзаголовка</a:t>
             </a:r>
             <a:endParaRPr lang="en-US" dirty="0"/>
@@ -700,7 +699,7 @@
             <a:fld id="{85A5DE44-605B-4D3B-B2B7-94543DF81A36}" type="datetimeFigureOut">
               <a:rPr lang="ru-RU" smtClean="0"/>
               <a:pPr/>
-              <a:t>01.09.2021</a:t>
+              <a:t>05.05.2026</a:t>
             </a:fld>
             <a:endParaRPr lang="ru-RU"/>
           </a:p>
@@ -795,7 +794,7 @@
           <a:lstStyle/>
           <a:p>
             <a:r>
-              <a:rPr lang="ru-RU" smtClean="0"/>
+              <a:rPr lang="ru-RU"/>
               <a:t>Образец заголовка</a:t>
             </a:r>
             <a:endParaRPr lang="en-US" dirty="0"/>
@@ -819,35 +818,35 @@
           <a:p>
             <a:pPr lvl="0"/>
             <a:r>
-              <a:rPr lang="ru-RU" smtClean="0"/>
+              <a:rPr lang="ru-RU"/>
               <a:t>Образец текста</a:t>
             </a:r>
           </a:p>
           <a:p>
             <a:pPr lvl="1"/>
             <a:r>
-              <a:rPr lang="ru-RU" smtClean="0"/>
+              <a:rPr lang="ru-RU"/>
               <a:t>Второй уровень</a:t>
             </a:r>
           </a:p>
           <a:p>
             <a:pPr lvl="2"/>
             <a:r>
-              <a:rPr lang="ru-RU" smtClean="0"/>
+              <a:rPr lang="ru-RU"/>
               <a:t>Третий уровень</a:t>
             </a:r>
           </a:p>
           <a:p>
             <a:pPr lvl="3"/>
             <a:r>
-              <a:rPr lang="ru-RU" smtClean="0"/>
+              <a:rPr lang="ru-RU"/>
               <a:t>Четвертый уровень</a:t>
             </a:r>
           </a:p>
           <a:p>
             <a:pPr lvl="4"/>
             <a:r>
-              <a:rPr lang="ru-RU" smtClean="0"/>
+              <a:rPr lang="ru-RU"/>
               <a:t>Пятый уровень</a:t>
             </a:r>
             <a:endParaRPr lang="en-US" dirty="0"/>
@@ -872,7 +871,7 @@
             <a:fld id="{85A5DE44-605B-4D3B-B2B7-94543DF81A36}" type="datetimeFigureOut">
               <a:rPr lang="ru-RU" smtClean="0"/>
               <a:pPr/>
-              <a:t>01.09.2021</a:t>
+              <a:t>05.05.2026</a:t>
             </a:fld>
             <a:endParaRPr lang="ru-RU"/>
           </a:p>
@@ -972,7 +971,7 @@
           <a:lstStyle/>
           <a:p>
             <a:r>
-              <a:rPr lang="ru-RU" smtClean="0"/>
+              <a:rPr lang="ru-RU"/>
               <a:t>Образец заголовка</a:t>
             </a:r>
             <a:endParaRPr lang="en-US" dirty="0"/>
@@ -1001,35 +1000,35 @@
           <a:p>
             <a:pPr lvl="0"/>
             <a:r>
-              <a:rPr lang="ru-RU" smtClean="0"/>
+              <a:rPr lang="ru-RU"/>
               <a:t>Образец текста</a:t>
             </a:r>
           </a:p>
           <a:p>
             <a:pPr lvl="1"/>
             <a:r>
-              <a:rPr lang="ru-RU" smtClean="0"/>
+              <a:rPr lang="ru-RU"/>
               <a:t>Второй уровень</a:t>
             </a:r>
           </a:p>
           <a:p>
             <a:pPr lvl="2"/>
             <a:r>
-              <a:rPr lang="ru-RU" smtClean="0"/>
+              <a:rPr lang="ru-RU"/>
               <a:t>Третий уровень</a:t>
             </a:r>
           </a:p>
           <a:p>
             <a:pPr lvl="3"/>
             <a:r>
-              <a:rPr lang="ru-RU" smtClean="0"/>
+              <a:rPr lang="ru-RU"/>
               <a:t>Четвертый уровень</a:t>
             </a:r>
           </a:p>
           <a:p>
             <a:pPr lvl="4"/>
             <a:r>
-              <a:rPr lang="ru-RU" smtClean="0"/>
+              <a:rPr lang="ru-RU"/>
               <a:t>Пятый уровень</a:t>
             </a:r>
             <a:endParaRPr lang="en-US" dirty="0"/>
@@ -1054,7 +1053,7 @@
             <a:fld id="{85A5DE44-605B-4D3B-B2B7-94543DF81A36}" type="datetimeFigureOut">
               <a:rPr lang="ru-RU" smtClean="0"/>
               <a:pPr/>
-              <a:t>01.09.2021</a:t>
+              <a:t>05.05.2026</a:t>
             </a:fld>
             <a:endParaRPr lang="ru-RU"/>
           </a:p>
@@ -1149,7 +1148,7 @@
           <a:lstStyle/>
           <a:p>
             <a:r>
-              <a:rPr lang="ru-RU" smtClean="0"/>
+              <a:rPr lang="ru-RU"/>
               <a:t>Образец заголовка</a:t>
             </a:r>
             <a:endParaRPr lang="en-US" dirty="0"/>
@@ -1173,35 +1172,35 @@
           <a:p>
             <a:pPr lvl="0"/>
             <a:r>
-              <a:rPr lang="ru-RU" smtClean="0"/>
+              <a:rPr lang="ru-RU"/>
               <a:t>Образец текста</a:t>
             </a:r>
           </a:p>
           <a:p>
             <a:pPr lvl="1"/>
             <a:r>
-              <a:rPr lang="ru-RU" smtClean="0"/>
+              <a:rPr lang="ru-RU"/>
               <a:t>Второй уровень</a:t>
             </a:r>
           </a:p>
           <a:p>
             <a:pPr lvl="2"/>
             <a:r>
-              <a:rPr lang="ru-RU" smtClean="0"/>
+              <a:rPr lang="ru-RU"/>
               <a:t>Третий уровень</a:t>
             </a:r>
           </a:p>
           <a:p>
             <a:pPr lvl="3"/>
             <a:r>
-              <a:rPr lang="ru-RU" smtClean="0"/>
+              <a:rPr lang="ru-RU"/>
               <a:t>Четвертый уровень</a:t>
             </a:r>
           </a:p>
           <a:p>
             <a:pPr lvl="4"/>
             <a:r>
-              <a:rPr lang="ru-RU" smtClean="0"/>
+              <a:rPr lang="ru-RU"/>
               <a:t>Пятый уровень</a:t>
             </a:r>
             <a:endParaRPr lang="en-US" dirty="0"/>
@@ -1226,7 +1225,7 @@
             <a:fld id="{85A5DE44-605B-4D3B-B2B7-94543DF81A36}" type="datetimeFigureOut">
               <a:rPr lang="ru-RU" smtClean="0"/>
               <a:pPr/>
-              <a:t>01.09.2021</a:t>
+              <a:t>05.05.2026</a:t>
             </a:fld>
             <a:endParaRPr lang="ru-RU"/>
           </a:p>
@@ -1330,7 +1329,7 @@
           </a:lstStyle>
           <a:p>
             <a:r>
-              <a:rPr lang="ru-RU" smtClean="0"/>
+              <a:rPr lang="ru-RU"/>
               <a:t>Образец заголовка</a:t>
             </a:r>
             <a:endParaRPr lang="en-US" dirty="0"/>
@@ -1450,7 +1449,7 @@
           <a:p>
             <a:pPr lvl="0"/>
             <a:r>
-              <a:rPr lang="ru-RU" smtClean="0"/>
+              <a:rPr lang="ru-RU"/>
               <a:t>Образец текста</a:t>
             </a:r>
           </a:p>
@@ -1474,7 +1473,7 @@
             <a:fld id="{85A5DE44-605B-4D3B-B2B7-94543DF81A36}" type="datetimeFigureOut">
               <a:rPr lang="ru-RU" smtClean="0"/>
               <a:pPr/>
-              <a:t>01.09.2021</a:t>
+              <a:t>05.05.2026</a:t>
             </a:fld>
             <a:endParaRPr lang="ru-RU"/>
           </a:p>
@@ -1569,7 +1568,7 @@
           <a:lstStyle/>
           <a:p>
             <a:r>
-              <a:rPr lang="ru-RU" smtClean="0"/>
+              <a:rPr lang="ru-RU"/>
               <a:t>Образец заголовка</a:t>
             </a:r>
             <a:endParaRPr lang="en-US" dirty="0"/>
@@ -1598,35 +1597,35 @@
           <a:p>
             <a:pPr lvl="0"/>
             <a:r>
-              <a:rPr lang="ru-RU" smtClean="0"/>
+              <a:rPr lang="ru-RU"/>
               <a:t>Образец текста</a:t>
             </a:r>
           </a:p>
           <a:p>
             <a:pPr lvl="1"/>
             <a:r>
-              <a:rPr lang="ru-RU" smtClean="0"/>
+              <a:rPr lang="ru-RU"/>
               <a:t>Второй уровень</a:t>
             </a:r>
           </a:p>
           <a:p>
             <a:pPr lvl="2"/>
             <a:r>
-              <a:rPr lang="ru-RU" smtClean="0"/>
+              <a:rPr lang="ru-RU"/>
               <a:t>Третий уровень</a:t>
             </a:r>
           </a:p>
           <a:p>
             <a:pPr lvl="3"/>
             <a:r>
-              <a:rPr lang="ru-RU" smtClean="0"/>
+              <a:rPr lang="ru-RU"/>
               <a:t>Четвертый уровень</a:t>
             </a:r>
           </a:p>
           <a:p>
             <a:pPr lvl="4"/>
             <a:r>
-              <a:rPr lang="ru-RU" smtClean="0"/>
+              <a:rPr lang="ru-RU"/>
               <a:t>Пятый уровень</a:t>
             </a:r>
             <a:endParaRPr lang="en-US" dirty="0"/>
@@ -1655,35 +1654,35 @@
           <a:p>
             <a:pPr lvl="0"/>
             <a:r>
-              <a:rPr lang="ru-RU" smtClean="0"/>
+              <a:rPr lang="ru-RU"/>
               <a:t>Образец текста</a:t>
             </a:r>
           </a:p>
           <a:p>
             <a:pPr lvl="1"/>
             <a:r>
-              <a:rPr lang="ru-RU" smtClean="0"/>
+              <a:rPr lang="ru-RU"/>
               <a:t>Второй уровень</a:t>
             </a:r>
           </a:p>
           <a:p>
             <a:pPr lvl="2"/>
             <a:r>
-              <a:rPr lang="ru-RU" smtClean="0"/>
+              <a:rPr lang="ru-RU"/>
               <a:t>Третий уровень</a:t>
             </a:r>
           </a:p>
           <a:p>
             <a:pPr lvl="3"/>
             <a:r>
-              <a:rPr lang="ru-RU" smtClean="0"/>
+              <a:rPr lang="ru-RU"/>
               <a:t>Четвертый уровень</a:t>
             </a:r>
           </a:p>
           <a:p>
             <a:pPr lvl="4"/>
             <a:r>
-              <a:rPr lang="ru-RU" smtClean="0"/>
+              <a:rPr lang="ru-RU"/>
               <a:t>Пятый уровень</a:t>
             </a:r>
             <a:endParaRPr lang="en-US" dirty="0"/>
@@ -1708,7 +1707,7 @@
             <a:fld id="{85A5DE44-605B-4D3B-B2B7-94543DF81A36}" type="datetimeFigureOut">
               <a:rPr lang="ru-RU" smtClean="0"/>
               <a:pPr/>
-              <a:t>01.09.2021</a:t>
+              <a:t>05.05.2026</a:t>
             </a:fld>
             <a:endParaRPr lang="ru-RU"/>
           </a:p>
@@ -1808,7 +1807,7 @@
           <a:lstStyle/>
           <a:p>
             <a:r>
-              <a:rPr lang="ru-RU" smtClean="0"/>
+              <a:rPr lang="ru-RU"/>
               <a:t>Образец заголовка</a:t>
             </a:r>
             <a:endParaRPr lang="en-US" dirty="0"/>
@@ -1874,7 +1873,7 @@
           <a:p>
             <a:pPr lvl="0"/>
             <a:r>
-              <a:rPr lang="ru-RU" smtClean="0"/>
+              <a:rPr lang="ru-RU"/>
               <a:t>Образец текста</a:t>
             </a:r>
           </a:p>
@@ -1902,35 +1901,35 @@
           <a:p>
             <a:pPr lvl="0"/>
             <a:r>
-              <a:rPr lang="ru-RU" smtClean="0"/>
+              <a:rPr lang="ru-RU"/>
               <a:t>Образец текста</a:t>
             </a:r>
           </a:p>
           <a:p>
             <a:pPr lvl="1"/>
             <a:r>
-              <a:rPr lang="ru-RU" smtClean="0"/>
+              <a:rPr lang="ru-RU"/>
               <a:t>Второй уровень</a:t>
             </a:r>
           </a:p>
           <a:p>
             <a:pPr lvl="2"/>
             <a:r>
-              <a:rPr lang="ru-RU" smtClean="0"/>
+              <a:rPr lang="ru-RU"/>
               <a:t>Третий уровень</a:t>
             </a:r>
           </a:p>
           <a:p>
             <a:pPr lvl="3"/>
             <a:r>
-              <a:rPr lang="ru-RU" smtClean="0"/>
+              <a:rPr lang="ru-RU"/>
               <a:t>Четвертый уровень</a:t>
             </a:r>
           </a:p>
           <a:p>
             <a:pPr lvl="4"/>
             <a:r>
-              <a:rPr lang="ru-RU" smtClean="0"/>
+              <a:rPr lang="ru-RU"/>
               <a:t>Пятый уровень</a:t>
             </a:r>
             <a:endParaRPr lang="en-US" dirty="0"/>
@@ -1996,7 +1995,7 @@
           <a:p>
             <a:pPr lvl="0"/>
             <a:r>
-              <a:rPr lang="ru-RU" smtClean="0"/>
+              <a:rPr lang="ru-RU"/>
               <a:t>Образец текста</a:t>
             </a:r>
           </a:p>
@@ -2024,35 +2023,35 @@
           <a:p>
             <a:pPr lvl="0"/>
             <a:r>
-              <a:rPr lang="ru-RU" smtClean="0"/>
+              <a:rPr lang="ru-RU"/>
               <a:t>Образец текста</a:t>
             </a:r>
           </a:p>
           <a:p>
             <a:pPr lvl="1"/>
             <a:r>
-              <a:rPr lang="ru-RU" smtClean="0"/>
+              <a:rPr lang="ru-RU"/>
               <a:t>Второй уровень</a:t>
             </a:r>
           </a:p>
           <a:p>
             <a:pPr lvl="2"/>
             <a:r>
-              <a:rPr lang="ru-RU" smtClean="0"/>
+              <a:rPr lang="ru-RU"/>
               <a:t>Третий уровень</a:t>
             </a:r>
           </a:p>
           <a:p>
             <a:pPr lvl="3"/>
             <a:r>
-              <a:rPr lang="ru-RU" smtClean="0"/>
+              <a:rPr lang="ru-RU"/>
               <a:t>Четвертый уровень</a:t>
             </a:r>
           </a:p>
           <a:p>
             <a:pPr lvl="4"/>
             <a:r>
-              <a:rPr lang="ru-RU" smtClean="0"/>
+              <a:rPr lang="ru-RU"/>
               <a:t>Пятый уровень</a:t>
             </a:r>
             <a:endParaRPr lang="en-US" dirty="0"/>
@@ -2077,7 +2076,7 @@
             <a:fld id="{85A5DE44-605B-4D3B-B2B7-94543DF81A36}" type="datetimeFigureOut">
               <a:rPr lang="ru-RU" smtClean="0"/>
               <a:pPr/>
-              <a:t>01.09.2021</a:t>
+              <a:t>05.05.2026</a:t>
             </a:fld>
             <a:endParaRPr lang="ru-RU"/>
           </a:p>
@@ -2172,7 +2171,7 @@
           <a:lstStyle/>
           <a:p>
             <a:r>
-              <a:rPr lang="ru-RU" smtClean="0"/>
+              <a:rPr lang="ru-RU"/>
               <a:t>Образец заголовка</a:t>
             </a:r>
             <a:endParaRPr lang="en-US" dirty="0"/>
@@ -2197,7 +2196,7 @@
             <a:fld id="{85A5DE44-605B-4D3B-B2B7-94543DF81A36}" type="datetimeFigureOut">
               <a:rPr lang="ru-RU" smtClean="0"/>
               <a:pPr/>
-              <a:t>01.09.2021</a:t>
+              <a:t>05.05.2026</a:t>
             </a:fld>
             <a:endParaRPr lang="ru-RU"/>
           </a:p>
@@ -2294,7 +2293,7 @@
             <a:fld id="{85A5DE44-605B-4D3B-B2B7-94543DF81A36}" type="datetimeFigureOut">
               <a:rPr lang="ru-RU" smtClean="0"/>
               <a:pPr/>
-              <a:t>01.09.2021</a:t>
+              <a:t>05.05.2026</a:t>
             </a:fld>
             <a:endParaRPr lang="ru-RU"/>
           </a:p>
@@ -2398,7 +2397,7 @@
           </a:lstStyle>
           <a:p>
             <a:r>
-              <a:rPr lang="ru-RU" smtClean="0"/>
+              <a:rPr lang="ru-RU"/>
               <a:t>Образец заголовка</a:t>
             </a:r>
             <a:endParaRPr lang="en-US" dirty="0"/>
@@ -2455,35 +2454,35 @@
           <a:p>
             <a:pPr lvl="0"/>
             <a:r>
-              <a:rPr lang="ru-RU" smtClean="0"/>
+              <a:rPr lang="ru-RU"/>
               <a:t>Образец текста</a:t>
             </a:r>
           </a:p>
           <a:p>
             <a:pPr lvl="1"/>
             <a:r>
-              <a:rPr lang="ru-RU" smtClean="0"/>
+              <a:rPr lang="ru-RU"/>
               <a:t>Второй уровень</a:t>
             </a:r>
           </a:p>
           <a:p>
             <a:pPr lvl="2"/>
             <a:r>
-              <a:rPr lang="ru-RU" smtClean="0"/>
+              <a:rPr lang="ru-RU"/>
               <a:t>Третий уровень</a:t>
             </a:r>
           </a:p>
           <a:p>
             <a:pPr lvl="3"/>
             <a:r>
-              <a:rPr lang="ru-RU" smtClean="0"/>
+              <a:rPr lang="ru-RU"/>
               <a:t>Четвертый уровень</a:t>
             </a:r>
           </a:p>
           <a:p>
             <a:pPr lvl="4"/>
             <a:r>
-              <a:rPr lang="ru-RU" smtClean="0"/>
+              <a:rPr lang="ru-RU"/>
               <a:t>Пятый уровень</a:t>
             </a:r>
             <a:endParaRPr lang="en-US" dirty="0"/>
@@ -2549,7 +2548,7 @@
           <a:p>
             <a:pPr lvl="0"/>
             <a:r>
-              <a:rPr lang="ru-RU" smtClean="0"/>
+              <a:rPr lang="ru-RU"/>
               <a:t>Образец текста</a:t>
             </a:r>
           </a:p>
@@ -2573,7 +2572,7 @@
             <a:fld id="{85A5DE44-605B-4D3B-B2B7-94543DF81A36}" type="datetimeFigureOut">
               <a:rPr lang="ru-RU" smtClean="0"/>
               <a:pPr/>
-              <a:t>01.09.2021</a:t>
+              <a:t>05.05.2026</a:t>
             </a:fld>
             <a:endParaRPr lang="ru-RU"/>
           </a:p>
@@ -2677,7 +2676,7 @@
           </a:lstStyle>
           <a:p>
             <a:r>
-              <a:rPr lang="ru-RU" smtClean="0"/>
+              <a:rPr lang="ru-RU"/>
               <a:t>Образец заголовка</a:t>
             </a:r>
             <a:endParaRPr lang="en-US" dirty="0"/>
@@ -2742,7 +2741,7 @@
           </a:lstStyle>
           <a:p>
             <a:r>
-              <a:rPr lang="ru-RU" smtClean="0"/>
+              <a:rPr lang="ru-RU"/>
               <a:t>Вставка рисунка</a:t>
             </a:r>
             <a:endParaRPr lang="en-US" dirty="0"/>
@@ -2808,7 +2807,7 @@
           <a:p>
             <a:pPr lvl="0"/>
             <a:r>
-              <a:rPr lang="ru-RU" smtClean="0"/>
+              <a:rPr lang="ru-RU"/>
               <a:t>Образец текста</a:t>
             </a:r>
           </a:p>
@@ -2832,7 +2831,7 @@
             <a:fld id="{85A5DE44-605B-4D3B-B2B7-94543DF81A36}" type="datetimeFigureOut">
               <a:rPr lang="ru-RU" smtClean="0"/>
               <a:pPr/>
-              <a:t>01.09.2021</a:t>
+              <a:t>05.05.2026</a:t>
             </a:fld>
             <a:endParaRPr lang="ru-RU"/>
           </a:p>
@@ -2942,7 +2941,7 @@
           <a:lstStyle/>
           <a:p>
             <a:r>
-              <a:rPr lang="ru-RU" smtClean="0"/>
+              <a:rPr lang="ru-RU"/>
               <a:t>Образец заголовка</a:t>
             </a:r>
             <a:endParaRPr lang="en-US" dirty="0"/>
@@ -2976,35 +2975,35 @@
           <a:p>
             <a:pPr lvl="0"/>
             <a:r>
-              <a:rPr lang="ru-RU" smtClean="0"/>
+              <a:rPr lang="ru-RU"/>
               <a:t>Образец текста</a:t>
             </a:r>
           </a:p>
           <a:p>
             <a:pPr lvl="1"/>
             <a:r>
-              <a:rPr lang="ru-RU" smtClean="0"/>
+              <a:rPr lang="ru-RU"/>
               <a:t>Второй уровень</a:t>
             </a:r>
           </a:p>
           <a:p>
             <a:pPr lvl="2"/>
             <a:r>
-              <a:rPr lang="ru-RU" smtClean="0"/>
+              <a:rPr lang="ru-RU"/>
               <a:t>Третий уровень</a:t>
             </a:r>
           </a:p>
           <a:p>
             <a:pPr lvl="3"/>
             <a:r>
-              <a:rPr lang="ru-RU" smtClean="0"/>
+              <a:rPr lang="ru-RU"/>
               <a:t>Четвертый уровень</a:t>
             </a:r>
           </a:p>
           <a:p>
             <a:pPr lvl="4"/>
             <a:r>
-              <a:rPr lang="ru-RU" smtClean="0"/>
+              <a:rPr lang="ru-RU"/>
               <a:t>Пятый уровень</a:t>
             </a:r>
             <a:endParaRPr lang="en-US" dirty="0"/>
@@ -3047,7 +3046,7 @@
             <a:fld id="{85A5DE44-605B-4D3B-B2B7-94543DF81A36}" type="datetimeFigureOut">
               <a:rPr lang="ru-RU" smtClean="0"/>
               <a:pPr/>
-              <a:t>01.09.2021</a:t>
+              <a:t>05.05.2026</a:t>
             </a:fld>
             <a:endParaRPr lang="ru-RU"/>
           </a:p>
@@ -3489,10 +3488,9 @@
           <a:p>
             <a:pPr algn="ctr"/>
             <a:r>
-              <a:rPr lang="ru-RU" sz="3600" b="1" dirty="0" smtClean="0"/>
+              <a:rPr lang="ru-RU" sz="3600" b="1" dirty="0"/>
               <a:t>294</a:t>
             </a:r>
-            <a:endParaRPr lang="ru-RU" sz="3600" b="1" dirty="0"/>
           </a:p>
         </p:txBody>
       </p:sp>
@@ -3688,10 +3686,9 @@
           <a:p>
             <a:pPr algn="ctr"/>
             <a:r>
-              <a:rPr lang="ru-RU" sz="700" dirty="0" smtClean="0"/>
+              <a:rPr lang="ru-RU" sz="700" dirty="0"/>
               <a:t>Введение военного положения</a:t>
             </a:r>
-            <a:endParaRPr lang="ru-RU" sz="700" dirty="0"/>
           </a:p>
         </p:txBody>
       </p:sp>
@@ -3737,10 +3734,9 @@
           <a:p>
             <a:pPr algn="ctr"/>
             <a:r>
-              <a:rPr lang="ru-RU" sz="700" dirty="0" smtClean="0"/>
+              <a:rPr lang="ru-RU" sz="700" dirty="0"/>
               <a:t>Выборы 1936</a:t>
             </a:r>
-            <a:endParaRPr lang="ru-RU" sz="700" dirty="0"/>
           </a:p>
         </p:txBody>
       </p:sp>
@@ -3783,14 +3779,13 @@
           <a:p>
             <a:pPr algn="ctr"/>
             <a:r>
-              <a:rPr lang="ru-RU" sz="700" dirty="0" err="1" smtClean="0"/>
+              <a:rPr lang="ru-RU" sz="700" dirty="0" err="1"/>
               <a:t>Прбеда</a:t>
             </a:r>
             <a:r>
-              <a:rPr lang="ru-RU" sz="700" dirty="0" smtClean="0"/>
+              <a:rPr lang="ru-RU" sz="700" dirty="0"/>
               <a:t> народного фронта</a:t>
             </a:r>
-            <a:endParaRPr lang="ru-RU" sz="700" dirty="0"/>
           </a:p>
         </p:txBody>
       </p:sp>
@@ -3873,11 +3868,11 @@
           <a:p>
             <a:pPr algn="ctr"/>
             <a:r>
-              <a:rPr lang="ru-RU" sz="700" dirty="0" smtClean="0"/>
+              <a:rPr lang="ru-RU" sz="700" dirty="0"/>
               <a:t>Победа национального </a:t>
             </a:r>
             <a:r>
-              <a:rPr lang="ru-RU" sz="700" dirty="0" err="1" smtClean="0"/>
+              <a:rPr lang="ru-RU" sz="700" dirty="0" err="1"/>
               <a:t>фрона</a:t>
             </a:r>
             <a:endParaRPr lang="ru-RU" sz="700" dirty="0"/>
@@ -4000,14 +3995,13 @@
           <a:p>
             <a:pPr algn="ctr"/>
             <a:r>
-              <a:rPr lang="ru-RU" sz="700" dirty="0" smtClean="0"/>
-              <a:t>Примириться с правыми силами </a:t>
-            </a:r>
-            <a:r>
-              <a:rPr lang="ru-RU" sz="500" dirty="0" smtClean="0"/>
+              <a:rPr lang="ru-RU" sz="700" dirty="0"/>
+              <a:t>Примириться с левыми силами </a:t>
+            </a:r>
+            <a:r>
+              <a:rPr lang="ru-RU" sz="500" dirty="0"/>
               <a:t>(только когда их влияние упадёт на ноль после репрессий)</a:t>
             </a:r>
-            <a:endParaRPr lang="ru-RU" sz="500" dirty="0"/>
           </a:p>
         </p:txBody>
       </p:sp>
@@ -4053,14 +4047,13 @@
           <a:p>
             <a:pPr algn="ctr"/>
             <a:r>
-              <a:rPr lang="ru-RU" sz="700" dirty="0" smtClean="0"/>
+              <a:rPr lang="ru-RU" sz="700" dirty="0"/>
               <a:t>Примириться с правыми силами </a:t>
             </a:r>
             <a:r>
-              <a:rPr lang="ru-RU" sz="500" dirty="0" smtClean="0"/>
+              <a:rPr lang="ru-RU" sz="500" dirty="0"/>
               <a:t>(только когда их влияние упадёт на ноль после репрессий)</a:t>
             </a:r>
-            <a:endParaRPr lang="ru-RU" sz="500" dirty="0"/>
           </a:p>
         </p:txBody>
       </p:sp>
@@ -4106,10 +4099,9 @@
           <a:p>
             <a:pPr algn="ctr"/>
             <a:r>
-              <a:rPr lang="ru-RU" sz="700" dirty="0" smtClean="0"/>
+              <a:rPr lang="ru-RU" sz="700" dirty="0"/>
               <a:t>Укрепление позиций центра (наше)</a:t>
             </a:r>
-            <a:endParaRPr lang="ru-RU" sz="700" dirty="0"/>
           </a:p>
         </p:txBody>
       </p:sp>
@@ -4269,14 +4261,13 @@
           <a:p>
             <a:pPr algn="ctr"/>
             <a:r>
-              <a:rPr lang="ru-RU" sz="700" dirty="0" err="1" smtClean="0"/>
+              <a:rPr lang="ru-RU" sz="700" dirty="0" err="1"/>
               <a:t>Послекризисные</a:t>
             </a:r>
             <a:r>
-              <a:rPr lang="ru-RU" sz="700" dirty="0" smtClean="0"/>
+              <a:rPr lang="ru-RU" sz="700" dirty="0"/>
               <a:t> выборы</a:t>
             </a:r>
-            <a:endParaRPr lang="ru-RU" sz="700" dirty="0"/>
           </a:p>
         </p:txBody>
       </p:sp>
@@ -4358,10 +4349,9 @@
           <a:p>
             <a:pPr algn="ctr"/>
             <a:r>
-              <a:rPr lang="ru-RU" sz="700" dirty="0" smtClean="0"/>
+              <a:rPr lang="ru-RU" sz="700" dirty="0"/>
               <a:t>Расширение прав президента (наше)</a:t>
             </a:r>
-            <a:endParaRPr lang="ru-RU" sz="700" dirty="0"/>
           </a:p>
         </p:txBody>
       </p:sp>
@@ -4445,10 +4435,9 @@
           <a:p>
             <a:pPr algn="ctr"/>
             <a:r>
-              <a:rPr lang="ru-RU" sz="700" dirty="0" smtClean="0"/>
+              <a:rPr lang="ru-RU" sz="700" dirty="0"/>
               <a:t>Продолжение аграрной реформы (наше)</a:t>
             </a:r>
-            <a:endParaRPr lang="ru-RU" sz="700" dirty="0"/>
           </a:p>
         </p:txBody>
       </p:sp>
@@ -4532,10 +4521,9 @@
           <a:p>
             <a:pPr algn="ctr"/>
             <a:r>
-              <a:rPr lang="ru-RU" sz="700" dirty="0" smtClean="0"/>
+              <a:rPr lang="ru-RU" sz="700" dirty="0"/>
               <a:t>Предоставление земли крестьянам (наше)</a:t>
             </a:r>
-            <a:endParaRPr lang="ru-RU" sz="700" dirty="0"/>
           </a:p>
         </p:txBody>
       </p:sp>
@@ -4582,13 +4570,8 @@
             <a:pPr algn="ctr"/>
             <a:r>
               <a:rPr lang="ru-RU" sz="700" dirty="0"/>
-              <a:t>Избавление от феодальных порядков (наше</a:t>
-            </a:r>
-            <a:r>
-              <a:rPr lang="ru-RU" sz="700" dirty="0" smtClean="0"/>
-              <a:t>)</a:t>
-            </a:r>
-            <a:endParaRPr lang="ru-RU" sz="700" dirty="0"/>
+              <a:t>Избавление от феодальных порядков (наше)</a:t>
+            </a:r>
           </a:p>
         </p:txBody>
       </p:sp>
@@ -4683,10 +4666,9 @@
           <a:p>
             <a:pPr algn="ctr"/>
             <a:r>
-              <a:rPr lang="ru-RU" sz="700" dirty="0" smtClean="0"/>
+              <a:rPr lang="ru-RU" sz="700" dirty="0"/>
               <a:t>Снятие чрезвычайного положения (наше)</a:t>
             </a:r>
-            <a:endParaRPr lang="ru-RU" sz="700" dirty="0"/>
           </a:p>
         </p:txBody>
       </p:sp>
@@ -4842,10 +4824,9 @@
           <a:p>
             <a:pPr algn="ctr"/>
             <a:r>
-              <a:rPr lang="ru-RU" sz="700" dirty="0" smtClean="0"/>
+              <a:rPr lang="ru-RU" sz="700" dirty="0"/>
               <a:t>Преодоление социального кризиса (наше)</a:t>
             </a:r>
-            <a:endParaRPr lang="ru-RU" sz="700" dirty="0"/>
           </a:p>
         </p:txBody>
       </p:sp>
@@ -4891,10 +4872,9 @@
           <a:p>
             <a:pPr algn="ctr"/>
             <a:r>
-              <a:rPr lang="ru-RU" sz="700" dirty="0" smtClean="0"/>
+              <a:rPr lang="ru-RU" sz="700" dirty="0"/>
               <a:t>Расширение роли профсоюзов (наше)</a:t>
             </a:r>
-            <a:endParaRPr lang="ru-RU" sz="700" dirty="0"/>
           </a:p>
         </p:txBody>
       </p:sp>
@@ -4940,10 +4920,9 @@
           <a:p>
             <a:pPr algn="ctr"/>
             <a:r>
-              <a:rPr lang="ru-RU" sz="700" dirty="0" smtClean="0"/>
+              <a:rPr lang="ru-RU" sz="700" dirty="0"/>
               <a:t>Разработка новых социальных законов (наше)</a:t>
             </a:r>
-            <a:endParaRPr lang="ru-RU" sz="700" dirty="0"/>
           </a:p>
         </p:txBody>
       </p:sp>
@@ -5027,10 +5006,9 @@
           <a:p>
             <a:pPr algn="ctr"/>
             <a:r>
-              <a:rPr lang="ru-RU" sz="700" dirty="0" smtClean="0"/>
+              <a:rPr lang="ru-RU" sz="700" dirty="0"/>
               <a:t>Расширение прав трудящихся (наше)</a:t>
             </a:r>
-            <a:endParaRPr lang="ru-RU" sz="700" dirty="0"/>
           </a:p>
         </p:txBody>
       </p:sp>
@@ -5076,10 +5054,9 @@
           <a:p>
             <a:pPr algn="ctr"/>
             <a:r>
-              <a:rPr lang="ru-RU" sz="700" dirty="0" smtClean="0"/>
+              <a:rPr lang="ru-RU" sz="700" dirty="0"/>
               <a:t>Расширение торговли с соседями (наше)</a:t>
             </a:r>
-            <a:endParaRPr lang="ru-RU" sz="700" dirty="0"/>
           </a:p>
         </p:txBody>
       </p:sp>
@@ -5381,10 +5358,9 @@
           <a:p>
             <a:pPr algn="ctr"/>
             <a:r>
-              <a:rPr lang="ru-RU" sz="700" dirty="0" smtClean="0"/>
+              <a:rPr lang="ru-RU" sz="700" dirty="0"/>
               <a:t>Борьба с провинциальным национализмом (национализация Каталонии и т.д.)</a:t>
             </a:r>
-            <a:endParaRPr lang="ru-RU" sz="700" dirty="0"/>
           </a:p>
         </p:txBody>
       </p:sp>
@@ -5436,13 +5412,6 @@
   <p:clrMapOvr>
     <a:masterClrMapping/>
   </p:clrMapOvr>
-  <p:timing>
-    <p:tnLst>
-      <p:par>
-        <p:cTn id="1" dur="indefinite" restart="never" nodeType="tmRoot"/>
-      </p:par>
-    </p:tnLst>
-  </p:timing>
 </p:sld>
 </file>
 
